--- a/public/exports/Pitch_Cafe_Combo_RM.pptx
+++ b/public/exports/Pitch_Cafe_Combo_RM.pptx
@@ -12842,7 +12842,7 @@
                 <a:ea typeface="Calibri" pitchFamily="34" charset="-122"/>
                 <a:cs typeface="Calibri" pitchFamily="34" charset="-120"/>
               </a:rPr>
-              <a:t>con corrección de costos (real $850k/mes), comisión tarjetas, valor terminal por múltiplo EBITDA, penalización por competencia y ramp-up año a año.
+              <a:t>con costos fijos a precio de mercado ($850k/mes), comisión tarjetas, valor terminal por múltiplo EBITDA, penalización por competencia y ramp-up año a año.
 </a:t>
             </a:r>
             <a:pPr indent="0" marL="0">
@@ -14589,7 +14589,7 @@
                 <a:ea typeface="Calibri" pitchFamily="34" charset="-122"/>
                 <a:cs typeface="Calibri" pitchFamily="34" charset="-120"/>
               </a:rPr>
-              <a:t>Tras corrección y auditoría del modelo financiero</a:t>
+              <a:t>Bajo el modelo financiero aplicado</a:t>
             </a:r>
             <a:pPr indent="0" marL="0">
               <a:buNone/>
@@ -14603,7 +14603,7 @@
                 <a:ea typeface="Calibri" pitchFamily="34" charset="-122"/>
                 <a:cs typeface="Calibri" pitchFamily="34" charset="-120"/>
               </a:rPr>
-              <a:t> (costos fijos reales del retail food chileno, comisión de tarjetas, valor terminal por múltiplo EBITDA, tasa de descuento de 14%, penalización por densidad de competencia, ramp-up año a año), </a:t>
+              <a:t> (costos fijos a precio de mercado del retail food chileno, comisión de tarjetas, valor terminal por múltiplo EBITDA, tasa de descuento de 14%, penalización por densidad de competencia, curva de ramp-up año a año), </a:t>
             </a:r>
             <a:pPr indent="0" marL="0">
               <a:buNone/>
